--- a/catalog/samples/premise_conclusion.pptx
+++ b/catalog/samples/premise_conclusion.pptx
@@ -1122,7 +1122,7 @@
           </a:p>
           <a:p>
             <a:r>
-              <a:t>  "template_sha256": "646dd6a4990ecf2fbaac2c1386e87a69ef114f040b652a4b8506ee4b78969a07"</a:t>
+              <a:t>  "template_sha256": "96c0c1dcf03dfe7f697f8e12341c526abe512dc1adc318c444b84a6a554b1bdf"</a:t>
             </a:r>
           </a:p>
           <a:p>
